--- a/04-python-development/unit4b-virtualenv.pptx
+++ b/04-python-development/unit4b-virtualenv.pptx
@@ -5041,7 +5041,7 @@
         <p:fade/>
       </p:transition>
     </mc:Choice>
-    <mc:Fallback xmlns="" xmlns:mv="urn:schemas-microsoft-com:mac:vml" xmlns:c="http://schemas.openxmlformats.org/drawingml/2006/chart" xmlns:dgm="http://schemas.openxmlformats.org/drawingml/2006/diagram" xmlns:o="urn:schemas-microsoft-com:office:office" xmlns:v="urn:schemas-microsoft-com:vml" xmlns:pvml="urn:schemas-microsoft-com:office:powerpoint" xmlns:com="http://schemas.openxmlformats.org/drawingml/2006/compatibility" xmlns:p15="http://schemas.microsoft.com/office/powerpoint/2012/main" xmlns:ahyp="http://schemas.microsoft.com/office/drawing/2018/hyperlinkcolor">
+    <mc:Fallback xmlns:ahyp="http://schemas.microsoft.com/office/drawing/2018/hyperlinkcolor" xmlns:p15="http://schemas.microsoft.com/office/powerpoint/2012/main" xmlns:com="http://schemas.openxmlformats.org/drawingml/2006/compatibility" xmlns:pvml="urn:schemas-microsoft-com:office:powerpoint" xmlns:v="urn:schemas-microsoft-com:vml" xmlns:o="urn:schemas-microsoft-com:office:office" xmlns:dgm="http://schemas.openxmlformats.org/drawingml/2006/diagram" xmlns:c="http://schemas.openxmlformats.org/drawingml/2006/chart" xmlns:mv="urn:schemas-microsoft-com:mac:vml" xmlns="">
       <p:transition spd="slow">
         <p:fade/>
       </p:transition>
@@ -5495,13 +5495,13 @@
   <p:clrMapOvr>
     <a:masterClrMapping/>
   </p:clrMapOvr>
-  <mc:AlternateContent xmlns:mc="http://schemas.openxmlformats.org/markup-compatibility/2006">
-    <mc:Choice xmlns:p14="http://schemas.microsoft.com/office/powerpoint/2010/main" Requires="p14">
+  <mc:AlternateContent xmlns:mc="http://schemas.openxmlformats.org/markup-compatibility/2006" xmlns:p14="http://schemas.microsoft.com/office/powerpoint/2010/main">
+    <mc:Choice Requires="p14">
       <p:transition spd="med" p14:dur="700">
         <p:fade/>
       </p:transition>
     </mc:Choice>
-    <mc:Fallback>
+    <mc:Fallback xmlns="">
       <p:transition spd="med">
         <p:fade/>
       </p:transition>
@@ -5767,7 +5767,7 @@
         <p:spPr>
           <a:xfrm>
             <a:off x="1069428" y="1943100"/>
-            <a:ext cx="16884805" cy="7694414"/>
+            <a:ext cx="16884805" cy="6709529"/>
           </a:xfrm>
           <a:prstGeom prst="rect">
             <a:avLst/>
@@ -5843,7 +5843,7 @@
                 <a:cs typeface="Courier New" panose="02070309020205020404" pitchFamily="49" charset="0"/>
                 <a:sym typeface="Arial"/>
               </a:rPr>
-              <a:t>virtualenv .venv                   # creates the folder .venv</a:t>
+              <a:t>virtualenv .venv             # creates the folder .venv</a:t>
             </a:r>
             <a:br>
               <a:rPr lang="en-US" sz="3200">
@@ -5864,7 +5864,7 @@
                 <a:cs typeface="Courier New" panose="02070309020205020404" pitchFamily="49" charset="0"/>
                 <a:sym typeface="Arial"/>
               </a:rPr>
-              <a:t>virtualenv \Envs\myenv             # creates the folder C:\Envs\myenv</a:t>
+              <a:t>virtualenv \Envs\myenv       # creates the folder C:\Envs\myenv</a:t>
             </a:r>
           </a:p>
           <a:p>
@@ -5881,7 +5881,7 @@
                 <a:cs typeface="Courier New" panose="02070309020205020404" pitchFamily="49" charset="0"/>
                 <a:sym typeface="Arial"/>
               </a:rPr>
-              <a:t>.venv\Scripts\activate.ps1         # Windows Powershell</a:t>
+              <a:t>.venv\Scripts\activate.ps1       # Windows Powershell</a:t>
             </a:r>
             <a:br>
               <a:rPr lang="en-US" sz="3200">
@@ -5902,7 +5902,7 @@
                 <a:cs typeface="Courier New" panose="02070309020205020404" pitchFamily="49" charset="0"/>
                 <a:sym typeface="Arial"/>
               </a:rPr>
-              <a:t>source .venv/bin/activate          # Linux</a:t>
+              <a:t>source .venv/bin/activate        # Linux</a:t>
             </a:r>
           </a:p>
           <a:p>
@@ -5919,7 +5919,7 @@
                 <a:cs typeface="Courier New" panose="02070309020205020404" pitchFamily="49" charset="0"/>
                 <a:sym typeface="Arial"/>
               </a:rPr>
-              <a:t>python –version</a:t>
+              <a:t>python –version                  </a:t>
             </a:r>
             <a:br>
               <a:rPr lang="en-US" sz="3200">
@@ -5940,7 +5940,7 @@
                 <a:cs typeface="Courier New" panose="02070309020205020404" pitchFamily="49" charset="0"/>
                 <a:sym typeface="Arial"/>
               </a:rPr>
-              <a:t>pip list                     # Check installed packages</a:t>
+              <a:t>pip list                      # Check installed packages</a:t>
             </a:r>
           </a:p>
           <a:p>
@@ -5957,7 +5957,7 @@
                 <a:cs typeface="Courier New" panose="02070309020205020404" pitchFamily="49" charset="0"/>
                 <a:sym typeface="Arial"/>
               </a:rPr>
-              <a:t>pip install –e .             # Install current library in virtualenv</a:t>
+              <a:t>pip install –e .        # Install current library in virtualenv</a:t>
             </a:r>
           </a:p>
           <a:p>
@@ -6012,7 +6012,7 @@
                 <a:cs typeface="Courier New" panose="02070309020205020404" pitchFamily="49" charset="0"/>
                 <a:sym typeface="Arial"/>
               </a:rPr>
-              <a:t>deactivate                   # return to global environment</a:t>
+              <a:t>deactivate              # return to global environment</a:t>
             </a:r>
           </a:p>
         </p:txBody>
@@ -6027,13 +6027,13 @@
   <p:clrMapOvr>
     <a:masterClrMapping/>
   </p:clrMapOvr>
-  <mc:AlternateContent xmlns:mc="http://schemas.openxmlformats.org/markup-compatibility/2006">
-    <mc:Choice xmlns:p14="http://schemas.microsoft.com/office/powerpoint/2010/main" Requires="p14">
+  <mc:AlternateContent xmlns:mc="http://schemas.openxmlformats.org/markup-compatibility/2006" xmlns:p14="http://schemas.microsoft.com/office/powerpoint/2010/main">
+    <mc:Choice Requires="p14">
       <p:transition spd="med" p14:dur="700">
         <p:fade/>
       </p:transition>
     </mc:Choice>
-    <mc:Fallback>
+    <mc:Fallback xmlns="">
       <p:transition spd="med">
         <p:fade/>
       </p:transition>

--- a/04-python-development/unit4b-virtualenv.pptx
+++ b/04-python-development/unit4b-virtualenv.pptx
@@ -226,7 +226,7 @@
           <a:p>
             <a:fld id="{792BC0D5-0843-46CE-B4B3-FDD7262E77E3}" type="datetimeFigureOut">
               <a:rPr lang="he-IL" smtClean="0"/>
-              <a:t>ז'/ניסן/תשפ"ו</a:t>
+              <a:t>ח'/ניסן/תשפ"ו</a:t>
             </a:fld>
             <a:endParaRPr lang="he-IL"/>
           </a:p>
@@ -1247,7 +1247,7 @@
             <a:fld id="{1D8BD707-D9CF-40AE-B4C6-C98DA3205C09}" type="datetimeFigureOut">
               <a:rPr lang="en-US" smtClean="0"/>
               <a:pPr/>
-              <a:t>3/25/2026</a:t>
+              <a:t>3/26/2026</a:t>
             </a:fld>
             <a:endParaRPr lang="en-US"/>
           </a:p>
@@ -1412,7 +1412,7 @@
             <a:fld id="{1D8BD707-D9CF-40AE-B4C6-C98DA3205C09}" type="datetimeFigureOut">
               <a:rPr lang="en-US" smtClean="0"/>
               <a:pPr/>
-              <a:t>3/25/2026</a:t>
+              <a:t>3/26/2026</a:t>
             </a:fld>
             <a:endParaRPr lang="en-US"/>
           </a:p>
@@ -1587,7 +1587,7 @@
             <a:fld id="{1D8BD707-D9CF-40AE-B4C6-C98DA3205C09}" type="datetimeFigureOut">
               <a:rPr lang="en-US" smtClean="0"/>
               <a:pPr/>
-              <a:t>3/25/2026</a:t>
+              <a:t>3/26/2026</a:t>
             </a:fld>
             <a:endParaRPr lang="en-US"/>
           </a:p>
@@ -1752,7 +1752,7 @@
             <a:fld id="{1D8BD707-D9CF-40AE-B4C6-C98DA3205C09}" type="datetimeFigureOut">
               <a:rPr lang="en-US" smtClean="0"/>
               <a:pPr/>
-              <a:t>3/25/2026</a:t>
+              <a:t>3/26/2026</a:t>
             </a:fld>
             <a:endParaRPr lang="en-US"/>
           </a:p>
@@ -1994,7 +1994,7 @@
             <a:fld id="{1D8BD707-D9CF-40AE-B4C6-C98DA3205C09}" type="datetimeFigureOut">
               <a:rPr lang="en-US" smtClean="0"/>
               <a:pPr/>
-              <a:t>3/25/2026</a:t>
+              <a:t>3/26/2026</a:t>
             </a:fld>
             <a:endParaRPr lang="en-US"/>
           </a:p>
@@ -2276,7 +2276,7 @@
             <a:fld id="{1D8BD707-D9CF-40AE-B4C6-C98DA3205C09}" type="datetimeFigureOut">
               <a:rPr lang="en-US" smtClean="0"/>
               <a:pPr/>
-              <a:t>3/25/2026</a:t>
+              <a:t>3/26/2026</a:t>
             </a:fld>
             <a:endParaRPr lang="en-US"/>
           </a:p>
@@ -2692,7 +2692,7 @@
             <a:fld id="{1D8BD707-D9CF-40AE-B4C6-C98DA3205C09}" type="datetimeFigureOut">
               <a:rPr lang="en-US" smtClean="0"/>
               <a:pPr/>
-              <a:t>3/25/2026</a:t>
+              <a:t>3/26/2026</a:t>
             </a:fld>
             <a:endParaRPr lang="en-US"/>
           </a:p>
@@ -2806,7 +2806,7 @@
             <a:fld id="{1D8BD707-D9CF-40AE-B4C6-C98DA3205C09}" type="datetimeFigureOut">
               <a:rPr lang="en-US" smtClean="0"/>
               <a:pPr/>
-              <a:t>3/25/2026</a:t>
+              <a:t>3/26/2026</a:t>
             </a:fld>
             <a:endParaRPr lang="en-US"/>
           </a:p>
@@ -2898,7 +2898,7 @@
             <a:fld id="{1D8BD707-D9CF-40AE-B4C6-C98DA3205C09}" type="datetimeFigureOut">
               <a:rPr lang="en-US" smtClean="0"/>
               <a:pPr/>
-              <a:t>3/25/2026</a:t>
+              <a:t>3/26/2026</a:t>
             </a:fld>
             <a:endParaRPr lang="en-US"/>
           </a:p>
@@ -3170,7 +3170,7 @@
             <a:fld id="{1D8BD707-D9CF-40AE-B4C6-C98DA3205C09}" type="datetimeFigureOut">
               <a:rPr lang="en-US" smtClean="0"/>
               <a:pPr/>
-              <a:t>3/25/2026</a:t>
+              <a:t>3/26/2026</a:t>
             </a:fld>
             <a:endParaRPr lang="en-US"/>
           </a:p>
@@ -3419,7 +3419,7 @@
             <a:fld id="{1D8BD707-D9CF-40AE-B4C6-C98DA3205C09}" type="datetimeFigureOut">
               <a:rPr lang="en-US" smtClean="0"/>
               <a:pPr/>
-              <a:t>3/25/2026</a:t>
+              <a:t>3/26/2026</a:t>
             </a:fld>
             <a:endParaRPr lang="en-US"/>
           </a:p>
@@ -3627,7 +3627,7 @@
             <a:fld id="{1D8BD707-D9CF-40AE-B4C6-C98DA3205C09}" type="datetimeFigureOut">
               <a:rPr lang="en-US" smtClean="0"/>
               <a:pPr/>
-              <a:t>3/25/2026</a:t>
+              <a:t>3/26/2026</a:t>
             </a:fld>
             <a:endParaRPr lang="en-US"/>
           </a:p>
@@ -4062,10 +4062,10 @@
             </a:pathLst>
           </a:custGeom>
           <a:blipFill>
-            <a:blip r:embed="rId2">
+            <a:blip>
               <a:extLst>
                 <a:ext uri="{96DAC541-7B7A-43D3-8B79-37D633B846F1}">
-                  <asvg:svgBlip xmlns:asvg="http://schemas.microsoft.com/office/drawing/2016/SVG/main" r:embed="rId3"/>
+                  <asvg:svgBlip xmlns:asvg="http://schemas.microsoft.com/office/drawing/2016/SVG/main" r:embed="rId2"/>
                 </a:ext>
               </a:extLst>
             </a:blip>
@@ -4121,7 +4121,7 @@
             </a:pathLst>
           </a:custGeom>
           <a:blipFill>
-            <a:blip r:embed="rId4"/>
+            <a:blip r:embed="rId3"/>
             <a:stretch>
               <a:fillRect/>
             </a:stretch>
@@ -4174,7 +4174,7 @@
             </a:pathLst>
           </a:custGeom>
           <a:blipFill>
-            <a:blip r:embed="rId4"/>
+            <a:blip r:embed="rId3"/>
             <a:stretch>
               <a:fillRect/>
             </a:stretch>
@@ -4227,10 +4227,10 @@
             </a:pathLst>
           </a:custGeom>
           <a:blipFill>
-            <a:blip r:embed="rId5">
+            <a:blip>
               <a:extLst>
                 <a:ext uri="{96DAC541-7B7A-43D3-8B79-37D633B846F1}">
-                  <asvg:svgBlip xmlns:asvg="http://schemas.microsoft.com/office/drawing/2016/SVG/main" r:embed="rId6"/>
+                  <asvg:svgBlip xmlns:asvg="http://schemas.microsoft.com/office/drawing/2016/SVG/main" r:embed="rId4"/>
                 </a:ext>
               </a:extLst>
             </a:blip>
@@ -4443,7 +4443,7 @@
             </a:pathLst>
           </a:custGeom>
           <a:blipFill>
-            <a:blip r:embed="rId7"/>
+            <a:blip r:embed="rId5"/>
             <a:stretch>
               <a:fillRect/>
             </a:stretch>
@@ -4920,7 +4920,7 @@
                 <a:cs typeface="Calibri" panose="020F0502020204030204" pitchFamily="34" charset="0"/>
                 <a:sym typeface="Arial"/>
               </a:rPr>
-              <a:t>numpy, scipy, cvxpy, network…</a:t>
+              <a:t>numpy, scipy, cvxpy, networkx…</a:t>
             </a:r>
             <a:r>
               <a:rPr lang="he-IL" sz="6000">
@@ -5041,7 +5041,7 @@
         <p:fade/>
       </p:transition>
     </mc:Choice>
-    <mc:Fallback xmlns:ahyp="http://schemas.microsoft.com/office/drawing/2018/hyperlinkcolor" xmlns:p15="http://schemas.microsoft.com/office/powerpoint/2012/main" xmlns:com="http://schemas.openxmlformats.org/drawingml/2006/compatibility" xmlns:pvml="urn:schemas-microsoft-com:office:powerpoint" xmlns:v="urn:schemas-microsoft-com:vml" xmlns:o="urn:schemas-microsoft-com:office:office" xmlns:dgm="http://schemas.openxmlformats.org/drawingml/2006/diagram" xmlns:c="http://schemas.openxmlformats.org/drawingml/2006/chart" xmlns:mv="urn:schemas-microsoft-com:mac:vml" xmlns="">
+    <mc:Fallback xmlns="" xmlns:mv="urn:schemas-microsoft-com:mac:vml" xmlns:c="http://schemas.openxmlformats.org/drawingml/2006/chart" xmlns:dgm="http://schemas.openxmlformats.org/drawingml/2006/diagram" xmlns:o="urn:schemas-microsoft-com:office:office" xmlns:v="urn:schemas-microsoft-com:vml" xmlns:pvml="urn:schemas-microsoft-com:office:powerpoint" xmlns:com="http://schemas.openxmlformats.org/drawingml/2006/compatibility" xmlns:p15="http://schemas.microsoft.com/office/powerpoint/2012/main" xmlns:ahyp="http://schemas.microsoft.com/office/drawing/2018/hyperlinkcolor">
       <p:transition spd="slow">
         <p:fade/>
       </p:transition>
@@ -5405,7 +5405,7 @@
         <p:spPr>
           <a:xfrm>
             <a:off x="1143000" y="2365746"/>
-            <a:ext cx="16884805" cy="6463308"/>
+            <a:ext cx="16884805" cy="7626703"/>
           </a:xfrm>
           <a:prstGeom prst="rect">
             <a:avLst/>
@@ -5458,16 +5458,30 @@
             </a:r>
           </a:p>
           <a:p>
-            <a:pPr marL="1143000" marR="0" lvl="0" indent="-1143000" algn="r" rtl="1">
+            <a:pPr marL="2057400" lvl="3" indent="-685800" algn="r" rtl="1">
               <a:lnSpc>
                 <a:spcPct val="140000"/>
               </a:lnSpc>
-              <a:spcBef>
-                <a:spcPts val="0"/>
-              </a:spcBef>
-              <a:spcAft>
-                <a:spcPts val="0"/>
-              </a:spcAft>
+              <a:buFont typeface="Courier New" panose="02070309020205020404" pitchFamily="49" charset="0"/>
+              <a:buChar char="o"/>
+            </a:pPr>
+            <a:r>
+              <a:rPr lang="he-IL" sz="4800">
+                <a:solidFill>
+                  <a:srgbClr val="081D3F"/>
+                </a:solidFill>
+                <a:latin typeface="Calibri" panose="020F0502020204030204" pitchFamily="34" charset="0"/>
+                <a:cs typeface="Calibri" panose="020F0502020204030204" pitchFamily="34" charset="0"/>
+                <a:sym typeface="Arial"/>
+              </a:rPr>
+              <a:t>דומה למכונה וירטואלית; אבל לא מכונה שלמה, רק תיקיה.</a:t>
+            </a:r>
+          </a:p>
+          <a:p>
+            <a:pPr marL="1143000" indent="-1143000" algn="r" rtl="1">
+              <a:lnSpc>
+                <a:spcPct val="140000"/>
+              </a:lnSpc>
               <a:buFont typeface="Arial" panose="020B0604020202020204" pitchFamily="34" charset="0"/>
               <a:buChar char="•"/>
             </a:pPr>
@@ -5613,6 +5627,55 @@
                       </p:childTnLst>
                     </p:cTn>
                   </p:par>
+                  <p:par>
+                    <p:cTn id="11" fill="hold">
+                      <p:stCondLst>
+                        <p:cond delay="indefinite"/>
+                      </p:stCondLst>
+                      <p:childTnLst>
+                        <p:par>
+                          <p:cTn id="12" fill="hold">
+                            <p:stCondLst>
+                              <p:cond delay="0"/>
+                            </p:stCondLst>
+                            <p:childTnLst>
+                              <p:par>
+                                <p:cTn id="13" presetID="1" presetClass="entr" presetSubtype="0" fill="hold" nodeType="clickEffect">
+                                  <p:stCondLst>
+                                    <p:cond delay="0"/>
+                                  </p:stCondLst>
+                                  <p:childTnLst>
+                                    <p:set>
+                                      <p:cBhvr>
+                                        <p:cTn id="14" dur="1" fill="hold">
+                                          <p:stCondLst>
+                                            <p:cond delay="0"/>
+                                          </p:stCondLst>
+                                        </p:cTn>
+                                        <p:tgtEl>
+                                          <p:spTgt spid="4">
+                                            <p:txEl>
+                                              <p:pRg st="2" end="2"/>
+                                            </p:txEl>
+                                          </p:spTgt>
+                                        </p:tgtEl>
+                                        <p:attrNameLst>
+                                          <p:attrName>style.visibility</p:attrName>
+                                        </p:attrNameLst>
+                                      </p:cBhvr>
+                                      <p:to>
+                                        <p:strVal val="visible"/>
+                                      </p:to>
+                                    </p:set>
+                                  </p:childTnLst>
+                                </p:cTn>
+                              </p:par>
+                            </p:childTnLst>
+                          </p:cTn>
+                        </p:par>
+                      </p:childTnLst>
+                    </p:cTn>
+                  </p:par>
                 </p:childTnLst>
               </p:cTn>
               <p:prevCondLst>
@@ -5803,7 +5866,7 @@
                 <a:cs typeface="Calibri" panose="020F0502020204030204" pitchFamily="34" charset="0"/>
                 <a:sym typeface="Arial"/>
               </a:rPr>
-              <a:t>טכנית, סביבה וירטואלית היא תיקיה על המחשב שלנו.</a:t>
+              <a:t>ניכנס לתיקיה שתחתיה נרצה להתקין את הסביבה. ואז:</a:t>
             </a:r>
           </a:p>
           <a:p>
